--- a/public/fun/pack/pptx/wedding/결혼식_34_오시는길중심_장독대마당.pptx
+++ b/public/fun/pack/pptx/wedding/결혼식_34_오시는길중심_장독대마당.pptx
@@ -3286,6 +3286,14 @@
 <file path=ppt/slides/slide1.xml><?xml version="1.0" encoding="utf-8"?>
 <p:sld xmlns:a="http://schemas.openxmlformats.org/drawingml/2006/main" xmlns:p="http://schemas.openxmlformats.org/presentationml/2006/main" xmlns:r="http://schemas.openxmlformats.org/officeDocument/2006/relationships">
   <p:cSld>
+    <p:bg>
+      <p:bgPr>
+        <a:solidFill>
+          <a:srgbClr val="FBEEEC"/>
+        </a:solidFill>
+        <a:effectLst/>
+      </p:bgPr>
+    </p:bg>
     <p:spTree>
       <p:nvGrpSpPr>
         <p:cNvPr id="1" name=""/>
@@ -3293,30 +3301,120 @@
         <p:nvPr/>
       </p:nvGrpSpPr>
       <p:grpSpPr/>
-      <p:pic>
-        <p:nvPicPr>
-          <p:cNvPr id="3" name="표지 그림" descr="wedding-34.jpg"/>
-          <p:cNvPicPr>
-            <a:picLocks noChangeAspect="1"/>
-          </p:cNvPicPr>
+      <p:sp>
+        <p:nvSpPr>
+          <p:cNvPr id="3" name="사진 자리"/>
+          <p:cNvSpPr/>
           <p:nvPr/>
-        </p:nvPicPr>
-        <p:blipFill>
-          <a:blip r:embed="rId2"/>
-          <a:stretch>
-            <a:fillRect/>
-          </a:stretch>
-        </p:blipFill>
-        <p:spPr>
-          <a:xfrm>
-            <a:off x="0" y="0"/>
-            <a:ext cx="12191695" cy="6858000"/>
+        </p:nvSpPr>
+        <p:spPr>
+          <a:xfrm>
+            <a:off x="1463003" y="960120"/>
+            <a:ext cx="3657508" cy="4526280"/>
+          </a:xfrm>
+          <a:prstGeom prst="roundRect">
+            <a:avLst>
+              <a:gd name="adj" fmla="val 4000"/>
+            </a:avLst>
+          </a:prstGeom>
+          <a:solidFill>
+            <a:srgbClr val="EBB6AD"/>
+          </a:solidFill>
+          <a:ln>
+            <a:noFill/>
+          </a:ln>
+        </p:spPr>
+        <p:txBody>
+          <a:bodyPr rtlCol="0" anchor="ctr" wrap="square" lIns="54864" rIns="54864" tIns="27432" bIns="27432">
+            <a:noAutofit/>
+          </a:bodyPr>
+          <a:lstStyle/>
+          <a:p>
+            <a:pPr algn="ctr">
+              <a:lnSpc>
+                <a:spcPct val="100000"/>
+              </a:lnSpc>
+            </a:pPr>
+            <a:r>
+              <a:rPr sz="1400" b="0" i="0">
+                <a:solidFill>
+                  <a:srgbClr val="492C27"/>
+                </a:solidFill>
+              </a:rPr>
+              <a:t>사진을 넣어 주세요</a:t>
+            </a:r>
+          </a:p>
+        </p:txBody>
+      </p:sp>
+      <p:sp>
+        <p:nvSpPr>
+          <p:cNvPr id="4" name="장식"/>
+          <p:cNvSpPr/>
+          <p:nvPr/>
+        </p:nvSpPr>
+        <p:spPr>
+          <a:xfrm>
+            <a:off x="975335" y="1234439"/>
+            <a:ext cx="3657508" cy="4526280"/>
+          </a:xfrm>
+          <a:prstGeom prst="roundRect">
+            <a:avLst>
+              <a:gd name="adj" fmla="val 4000"/>
+            </a:avLst>
+          </a:prstGeom>
+          <a:noFill/>
+          <a:ln w="9525">
+            <a:solidFill>
+              <a:srgbClr val="26231F"/>
+            </a:solidFill>
+          </a:ln>
+        </p:spPr>
+        <p:txBody>
+          <a:bodyPr rtlCol="0" anchor="ctr"/>
+          <a:lstStyle/>
+          <a:p>
+            <a:pPr algn="ctr"/>
+          </a:p>
+        </p:txBody>
+      </p:sp>
+      <p:sp>
+        <p:nvSpPr>
+          <p:cNvPr id="5" name="라벨"/>
+          <p:cNvSpPr txBox="1"/>
+          <p:nvPr/>
+        </p:nvSpPr>
+        <p:spPr>
+          <a:xfrm>
+            <a:off x="6827349" y="2148840"/>
+            <a:ext cx="4632844" cy="274320"/>
           </a:xfrm>
           <a:prstGeom prst="rect">
             <a:avLst/>
           </a:prstGeom>
-        </p:spPr>
-      </p:pic>
+          <a:noFill/>
+        </p:spPr>
+        <p:txBody>
+          <a:bodyPr wrap="square" lIns="54864" rIns="54864" tIns="27432" bIns="27432" anchor="t">
+            <a:noAutofit/>
+          </a:bodyPr>
+          <a:lstStyle/>
+          <a:p>
+            <a:pPr algn="l">
+              <a:lnSpc>
+                <a:spcPct val="115000"/>
+              </a:lnSpc>
+            </a:pPr>
+            <a:r>
+              <a:rPr sz="1000" b="1" i="0" spc="250">
+                <a:solidFill>
+                  <a:srgbClr val="26231F"/>
+                </a:solidFill>
+              </a:rPr>
+              <a:t>WEDDING</a:t>
+            </a:r>
+          </a:p>
+        </p:txBody>
+      </p:sp>
       <p:sp>
         <p:nvSpPr>
           <p:cNvPr id="2" name="Title 1"/>
@@ -3329,8 +3427,8 @@
         </p:nvSpPr>
         <p:spPr>
           <a:xfrm>
-            <a:off x="853418" y="2057400"/>
-            <a:ext cx="6095847" cy="1554480"/>
+            <a:off x="6827349" y="2606040"/>
+            <a:ext cx="4632844" cy="1188720"/>
           </a:xfrm>
         </p:spPr>
         <p:txBody>
@@ -3347,7 +3445,7 @@
             <a:r>
               <a:rPr sz="3600" b="1" i="0">
                 <a:solidFill>
-                  <a:srgbClr val="4D2019"/>
+                  <a:srgbClr val="26231F"/>
                 </a:solidFill>
               </a:rPr>
               <a:t>저희 결혼합니다</a:t>
@@ -3357,14 +3455,14 @@
       </p:sp>
       <p:sp>
         <p:nvSpPr>
-          <p:cNvPr id="4" name="한 줄 문구"/>
+          <p:cNvPr id="6" name="한 줄 문구"/>
           <p:cNvSpPr txBox="1"/>
           <p:nvPr/>
         </p:nvSpPr>
         <p:spPr>
           <a:xfrm>
-            <a:off x="853418" y="3749039"/>
-            <a:ext cx="6095847" cy="822960"/>
+            <a:off x="6827349" y="3886200"/>
+            <a:ext cx="4632844" cy="822960"/>
           </a:xfrm>
           <a:prstGeom prst="rect">
             <a:avLst/>
@@ -3383,9 +3481,9 @@
               </a:lnSpc>
             </a:pPr>
             <a:r>
-              <a:rPr sz="1700" b="0" i="1">
-                <a:solidFill>
-                  <a:srgbClr val="4D2019"/>
+              <a:rPr sz="1700" b="0" i="0">
+                <a:solidFill>
+                  <a:srgbClr val="26231F"/>
                 </a:solidFill>
               </a:rPr>
               <a:t>단체 버스는 따로 마련했습니다</a:t>
@@ -3395,14 +3493,14 @@
       </p:sp>
       <p:sp>
         <p:nvSpPr>
-          <p:cNvPr id="5" name="안내 문구"/>
+          <p:cNvPr id="7" name="안내 문구"/>
           <p:cNvSpPr txBox="1"/>
           <p:nvPr/>
         </p:nvSpPr>
         <p:spPr>
           <a:xfrm>
-            <a:off x="853418" y="4617720"/>
-            <a:ext cx="6095847" cy="914400"/>
+            <a:off x="6827349" y="4754880"/>
+            <a:ext cx="4632844" cy="914400"/>
           </a:xfrm>
           <a:prstGeom prst="rect">
             <a:avLst/>
@@ -3423,7 +3521,7 @@
             <a:r>
               <a:rPr sz="1400" b="0" i="0">
                 <a:solidFill>
-                  <a:srgbClr val="666666"/>
+                  <a:srgbClr val="26231F"/>
                 </a:solidFill>
               </a:rPr>
               <a:t>신랑 이름 ♥ 신부 이름</a:t>
@@ -3438,10 +3536,10 @@
             <a:r>
               <a:rPr sz="1400" b="0" i="0">
                 <a:solidFill>
-                  <a:srgbClr val="666666"/>
+                  <a:srgbClr val="26231F"/>
                 </a:solidFill>
               </a:rPr>
-              <a:t>2027. 00. 00 · 예식장 이름</a:t>
+              <a:t>날짜 입력 · 예식장 이름</a:t>
             </a:r>
           </a:p>
         </p:txBody>
@@ -3460,7 +3558,7 @@
     <p:bg>
       <p:bgPr>
         <a:solidFill>
-          <a:srgbClr val="FAF1F0"/>
+          <a:srgbClr val="F6D9D5"/>
         </a:solidFill>
         <a:effectLst/>
       </p:bgPr>
@@ -3480,14 +3578,14 @@
         </p:nvSpPr>
         <p:spPr>
           <a:xfrm>
-            <a:off x="0" y="6035040"/>
-            <a:ext cx="1737360" cy="822960"/>
-          </a:xfrm>
-          <a:prstGeom prst="rtTriangle">
+            <a:off x="10180015" y="-1645920"/>
+            <a:ext cx="3474720" cy="3474720"/>
+          </a:xfrm>
+          <a:prstGeom prst="ellipse">
             <a:avLst/>
           </a:prstGeom>
           <a:solidFill>
-            <a:srgbClr val="F1D4D0"/>
+            <a:srgbClr val="EBB6AD"/>
           </a:solidFill>
           <a:ln>
             <a:noFill/>
@@ -3503,20 +3601,58 @@
       </p:sp>
       <p:sp>
         <p:nvSpPr>
-          <p:cNvPr id="4" name="장식"/>
+          <p:cNvPr id="4" name="상단 라벨"/>
+          <p:cNvSpPr txBox="1"/>
+          <p:nvPr/>
+        </p:nvSpPr>
+        <p:spPr>
+          <a:xfrm>
+            <a:off x="640080" y="274320"/>
+            <a:ext cx="5486400" cy="274320"/>
+          </a:xfrm>
+          <a:prstGeom prst="rect">
+            <a:avLst/>
+          </a:prstGeom>
+          <a:noFill/>
+        </p:spPr>
+        <p:txBody>
+          <a:bodyPr wrap="square" lIns="54864" rIns="54864" tIns="27432" bIns="27432" anchor="ctr">
+            <a:noAutofit/>
+          </a:bodyPr>
+          <a:lstStyle/>
+          <a:p>
+            <a:pPr algn="l">
+              <a:lnSpc>
+                <a:spcPct val="115000"/>
+              </a:lnSpc>
+            </a:pPr>
+            <a:r>
+              <a:rPr sz="900" b="1" i="0" spc="250">
+                <a:solidFill>
+                  <a:srgbClr val="26231F"/>
+                </a:solidFill>
+              </a:rPr>
+              <a:t>WEDDING</a:t>
+            </a:r>
+          </a:p>
+        </p:txBody>
+      </p:sp>
+      <p:sp>
+        <p:nvSpPr>
+          <p:cNvPr id="5" name="포인트"/>
           <p:cNvSpPr/>
           <p:nvPr/>
         </p:nvSpPr>
         <p:spPr>
           <a:xfrm>
-            <a:off x="0" y="6400800"/>
-            <a:ext cx="914400" cy="457200"/>
-          </a:xfrm>
-          <a:prstGeom prst="rtTriangle">
+            <a:off x="11048695" y="502919"/>
+            <a:ext cx="274320" cy="274320"/>
+          </a:xfrm>
+          <a:prstGeom prst="sun">
             <a:avLst/>
           </a:prstGeom>
           <a:solidFill>
-            <a:srgbClr val="994133"/>
+            <a:srgbClr val="FFFFFF"/>
           </a:solidFill>
           <a:ln>
             <a:noFill/>
@@ -3542,8 +3678,8 @@
         </p:nvSpPr>
         <p:spPr>
           <a:xfrm>
-            <a:off x="640080" y="457200"/>
-            <a:ext cx="9722815" cy="868680"/>
+            <a:off x="640080" y="658368"/>
+            <a:ext cx="9082735" cy="868680"/>
           </a:xfrm>
         </p:spPr>
         <p:txBody>
@@ -3560,7 +3696,7 @@
             <a:r>
               <a:rPr sz="3000" b="1" i="0">
                 <a:solidFill>
-                  <a:srgbClr val="4D2019"/>
+                  <a:srgbClr val="26231F"/>
                 </a:solidFill>
               </a:rPr>
               <a:t>신랑 · 신부 소개</a:t>
@@ -3570,25 +3706,23 @@
       </p:sp>
       <p:sp>
         <p:nvSpPr>
-          <p:cNvPr id="5" name="사진 자리"/>
+          <p:cNvPr id="6" name="사진 자리"/>
           <p:cNvSpPr/>
           <p:nvPr/>
         </p:nvSpPr>
         <p:spPr>
           <a:xfrm>
-            <a:off x="1939213" y="1600200"/>
-            <a:ext cx="2400300" cy="2400300"/>
+            <a:off x="1996363" y="1783080"/>
+            <a:ext cx="2286000" cy="2286000"/>
           </a:xfrm>
           <a:prstGeom prst="ellipse">
             <a:avLst/>
           </a:prstGeom>
           <a:solidFill>
-            <a:srgbClr val="F1D4D0"/>
+            <a:srgbClr val="F6D9D5"/>
           </a:solidFill>
           <a:ln w="19050">
-            <a:solidFill>
-              <a:srgbClr val="994133"/>
-            </a:solidFill>
+            <a:noFill/>
             <a:prstDash val="dash"/>
           </a:ln>
         </p:spPr>
@@ -3606,7 +3740,7 @@
             <a:r>
               <a:rPr sz="1200" b="0" i="0">
                 <a:solidFill>
-                  <a:srgbClr val="4D2019"/>
+                  <a:srgbClr val="8E8780"/>
                 </a:solidFill>
               </a:rPr>
               <a:t>사진</a:t>
@@ -3616,13 +3750,13 @@
       </p:sp>
       <p:sp>
         <p:nvSpPr>
-          <p:cNvPr id="6" name="TextBox 5"/>
+          <p:cNvPr id="7" name="TextBox 6"/>
           <p:cNvSpPr txBox="1"/>
           <p:nvPr/>
         </p:nvSpPr>
         <p:spPr>
           <a:xfrm>
-            <a:off x="640080" y="4091939"/>
+            <a:off x="640080" y="4160520"/>
             <a:ext cx="4998567" cy="411480"/>
           </a:xfrm>
           <a:prstGeom prst="rect">
@@ -3644,7 +3778,7 @@
             <a:r>
               <a:rPr sz="1600" b="1" i="0">
                 <a:solidFill>
-                  <a:srgbClr val="4D2019"/>
+                  <a:srgbClr val="492C27"/>
                 </a:solidFill>
               </a:rPr>
               <a:t>신랑</a:t>
@@ -3654,14 +3788,14 @@
       </p:sp>
       <p:sp>
         <p:nvSpPr>
-          <p:cNvPr id="7" name="TextBox 6"/>
+          <p:cNvPr id="8" name="TextBox 7"/>
           <p:cNvSpPr txBox="1"/>
           <p:nvPr/>
         </p:nvSpPr>
         <p:spPr>
           <a:xfrm>
-            <a:off x="731519" y="4549140"/>
-            <a:ext cx="4815687" cy="1851660"/>
+            <a:off x="731519" y="4617720"/>
+            <a:ext cx="4815687" cy="1737360"/>
           </a:xfrm>
           <a:prstGeom prst="rect">
             <a:avLst/>
@@ -3722,25 +3856,23 @@
       </p:sp>
       <p:sp>
         <p:nvSpPr>
-          <p:cNvPr id="8" name="사진 자리"/>
+          <p:cNvPr id="9" name="사진 자리"/>
           <p:cNvSpPr/>
           <p:nvPr/>
         </p:nvSpPr>
         <p:spPr>
           <a:xfrm>
-            <a:off x="7852181" y="1600200"/>
-            <a:ext cx="2400300" cy="2400300"/>
+            <a:off x="7909331" y="1783080"/>
+            <a:ext cx="2286000" cy="2286000"/>
           </a:xfrm>
           <a:prstGeom prst="ellipse">
             <a:avLst/>
           </a:prstGeom>
           <a:solidFill>
-            <a:srgbClr val="F1D4D0"/>
+            <a:srgbClr val="F6D9D5"/>
           </a:solidFill>
           <a:ln w="19050">
-            <a:solidFill>
-              <a:srgbClr val="994133"/>
-            </a:solidFill>
+            <a:noFill/>
             <a:prstDash val="dash"/>
           </a:ln>
         </p:spPr>
@@ -3758,7 +3890,7 @@
             <a:r>
               <a:rPr sz="1200" b="0" i="0">
                 <a:solidFill>
-                  <a:srgbClr val="4D2019"/>
+                  <a:srgbClr val="8E8780"/>
                 </a:solidFill>
               </a:rPr>
               <a:t>사진</a:t>
@@ -3768,13 +3900,13 @@
       </p:sp>
       <p:sp>
         <p:nvSpPr>
-          <p:cNvPr id="9" name="TextBox 8"/>
+          <p:cNvPr id="10" name="TextBox 9"/>
           <p:cNvSpPr txBox="1"/>
           <p:nvPr/>
         </p:nvSpPr>
         <p:spPr>
           <a:xfrm>
-            <a:off x="6553047" y="4091939"/>
+            <a:off x="6553047" y="4160520"/>
             <a:ext cx="4998567" cy="411480"/>
           </a:xfrm>
           <a:prstGeom prst="rect">
@@ -3796,7 +3928,7 @@
             <a:r>
               <a:rPr sz="1600" b="1" i="0">
                 <a:solidFill>
-                  <a:srgbClr val="4D2019"/>
+                  <a:srgbClr val="492C27"/>
                 </a:solidFill>
               </a:rPr>
               <a:t>신부</a:t>
@@ -3806,14 +3938,14 @@
       </p:sp>
       <p:sp>
         <p:nvSpPr>
-          <p:cNvPr id="10" name="TextBox 9"/>
+          <p:cNvPr id="11" name="TextBox 10"/>
           <p:cNvSpPr txBox="1"/>
           <p:nvPr/>
         </p:nvSpPr>
         <p:spPr>
           <a:xfrm>
-            <a:off x="6644487" y="4549140"/>
-            <a:ext cx="4815687" cy="1851660"/>
+            <a:off x="6644487" y="4617720"/>
+            <a:ext cx="4815687" cy="1737360"/>
           </a:xfrm>
           <a:prstGeom prst="rect">
             <a:avLst/>
@@ -3886,7 +4018,7 @@
     <p:bg>
       <p:bgPr>
         <a:solidFill>
-          <a:srgbClr val="FAF1F0"/>
+          <a:srgbClr val="F6D9D5"/>
         </a:solidFill>
         <a:effectLst/>
       </p:bgPr>
@@ -3906,14 +4038,14 @@
         </p:nvSpPr>
         <p:spPr>
           <a:xfrm>
-            <a:off x="0" y="6035040"/>
-            <a:ext cx="1737360" cy="822960"/>
-          </a:xfrm>
-          <a:prstGeom prst="rtTriangle">
+            <a:off x="10180015" y="-1645920"/>
+            <a:ext cx="3474720" cy="3474720"/>
+          </a:xfrm>
+          <a:prstGeom prst="ellipse">
             <a:avLst/>
           </a:prstGeom>
           <a:solidFill>
-            <a:srgbClr val="F1D4D0"/>
+            <a:srgbClr val="EBB6AD"/>
           </a:solidFill>
           <a:ln>
             <a:noFill/>
@@ -3929,20 +4061,58 @@
       </p:sp>
       <p:sp>
         <p:nvSpPr>
-          <p:cNvPr id="4" name="장식"/>
+          <p:cNvPr id="4" name="상단 라벨"/>
+          <p:cNvSpPr txBox="1"/>
+          <p:nvPr/>
+        </p:nvSpPr>
+        <p:spPr>
+          <a:xfrm>
+            <a:off x="640080" y="274320"/>
+            <a:ext cx="5486400" cy="274320"/>
+          </a:xfrm>
+          <a:prstGeom prst="rect">
+            <a:avLst/>
+          </a:prstGeom>
+          <a:noFill/>
+        </p:spPr>
+        <p:txBody>
+          <a:bodyPr wrap="square" lIns="54864" rIns="54864" tIns="27432" bIns="27432" anchor="ctr">
+            <a:noAutofit/>
+          </a:bodyPr>
+          <a:lstStyle/>
+          <a:p>
+            <a:pPr algn="l">
+              <a:lnSpc>
+                <a:spcPct val="115000"/>
+              </a:lnSpc>
+            </a:pPr>
+            <a:r>
+              <a:rPr sz="900" b="1" i="0" spc="250">
+                <a:solidFill>
+                  <a:srgbClr val="26231F"/>
+                </a:solidFill>
+              </a:rPr>
+              <a:t>WEDDING</a:t>
+            </a:r>
+          </a:p>
+        </p:txBody>
+      </p:sp>
+      <p:sp>
+        <p:nvSpPr>
+          <p:cNvPr id="5" name="포인트"/>
           <p:cNvSpPr/>
           <p:nvPr/>
         </p:nvSpPr>
         <p:spPr>
           <a:xfrm>
-            <a:off x="0" y="6400800"/>
-            <a:ext cx="914400" cy="457200"/>
-          </a:xfrm>
-          <a:prstGeom prst="rtTriangle">
+            <a:off x="11048695" y="502919"/>
+            <a:ext cx="274320" cy="274320"/>
+          </a:xfrm>
+          <a:prstGeom prst="sun">
             <a:avLst/>
           </a:prstGeom>
           <a:solidFill>
-            <a:srgbClr val="994133"/>
+            <a:srgbClr val="FFFFFF"/>
           </a:solidFill>
           <a:ln>
             <a:noFill/>
@@ -3968,8 +4138,8 @@
         </p:nvSpPr>
         <p:spPr>
           <a:xfrm>
-            <a:off x="640080" y="457200"/>
-            <a:ext cx="9722815" cy="868680"/>
+            <a:off x="640080" y="658368"/>
+            <a:ext cx="9082735" cy="868680"/>
           </a:xfrm>
         </p:spPr>
         <p:txBody>
@@ -3986,7 +4156,7 @@
             <a:r>
               <a:rPr sz="3000" b="1" i="0">
                 <a:solidFill>
-                  <a:srgbClr val="4D2019"/>
+                  <a:srgbClr val="26231F"/>
                 </a:solidFill>
               </a:rPr>
               <a:t>오시는 길</a:t>
@@ -3996,14 +4166,14 @@
       </p:sp>
       <p:sp>
         <p:nvSpPr>
-          <p:cNvPr id="5" name="사진 자리"/>
+          <p:cNvPr id="6" name="사진 자리"/>
           <p:cNvSpPr/>
           <p:nvPr/>
         </p:nvSpPr>
         <p:spPr>
           <a:xfrm>
-            <a:off x="640080" y="1600200"/>
-            <a:ext cx="6035040" cy="4800600"/>
+            <a:off x="640080" y="1783080"/>
+            <a:ext cx="6035040" cy="4572000"/>
           </a:xfrm>
           <a:prstGeom prst="roundRect">
             <a:avLst>
@@ -4011,12 +4181,10 @@
             </a:avLst>
           </a:prstGeom>
           <a:solidFill>
-            <a:srgbClr val="F1D4D0"/>
+            <a:srgbClr val="F6D9D5"/>
           </a:solidFill>
           <a:ln w="19050">
-            <a:solidFill>
-              <a:srgbClr val="994133"/>
-            </a:solidFill>
+            <a:noFill/>
             <a:prstDash val="dash"/>
           </a:ln>
         </p:spPr>
@@ -4034,7 +4202,7 @@
             <a:r>
               <a:rPr sz="1400" b="0" i="0">
                 <a:solidFill>
-                  <a:srgbClr val="4D2019"/>
+                  <a:srgbClr val="8E8780"/>
                 </a:solidFill>
               </a:rPr>
               <a:t>약도 · 지도를 넣어 주세요</a:t>
@@ -4044,14 +4212,14 @@
       </p:sp>
       <p:graphicFrame>
         <p:nvGraphicFramePr>
-          <p:cNvPr id="6" name="표"/>
+          <p:cNvPr id="7" name="표"/>
           <p:cNvGraphicFramePr>
             <a:graphicFrameLocks noGrp="1"/>
           </p:cNvGraphicFramePr>
           <p:nvPr/>
         </p:nvGraphicFramePr>
         <p:xfrm>
-          <a:off x="7040880" y="1600200"/>
+          <a:off x="7040880" y="1783080"/>
           <a:ext cx="4510735" cy="3291840"/>
         </p:xfrm>
         <a:graphic>
@@ -4074,7 +4242,7 @@
                       <a:r>
                         <a:rPr sz="1400" b="1">
                           <a:solidFill>
-                            <a:srgbClr val="4D2019"/>
+                            <a:srgbClr val="492C27"/>
                           </a:solidFill>
                         </a:rPr>
                         <a:t>예식장</a:t>
@@ -4084,30 +4252,30 @@
                   <a:tcPr anchor="ctr" marL="73152" marR="73152">
                     <a:lnL w="9525" cap="flat" cmpd="sng" algn="ctr">
                       <a:solidFill>
-                        <a:srgbClr val="F1D4D0"/>
+                        <a:srgbClr val="F6D9D5"/>
                       </a:solidFill>
                       <a:prstDash val="solid"/>
                     </a:lnL>
                     <a:lnR w="9525" cap="flat" cmpd="sng" algn="ctr">
                       <a:solidFill>
-                        <a:srgbClr val="F1D4D0"/>
+                        <a:srgbClr val="F6D9D5"/>
                       </a:solidFill>
                       <a:prstDash val="solid"/>
                     </a:lnR>
                     <a:lnT w="9525" cap="flat" cmpd="sng" algn="ctr">
                       <a:solidFill>
-                        <a:srgbClr val="F1D4D0"/>
+                        <a:srgbClr val="F6D9D5"/>
                       </a:solidFill>
                       <a:prstDash val="solid"/>
                     </a:lnT>
                     <a:lnB w="9525" cap="flat" cmpd="sng" algn="ctr">
                       <a:solidFill>
-                        <a:srgbClr val="F1D4D0"/>
+                        <a:srgbClr val="F6D9D5"/>
                       </a:solidFill>
                       <a:prstDash val="solid"/>
                     </a:lnB>
                     <a:solidFill>
-                      <a:srgbClr val="F1D4D0"/>
+                      <a:srgbClr val="F6D9D5"/>
                     </a:solidFill>
                   </a:tcPr>
                 </a:tc>
@@ -4120,7 +4288,7 @@
                       <a:r>
                         <a:rPr sz="1400" b="0">
                           <a:solidFill>
-                            <a:srgbClr val="2B2B2B"/>
+                            <a:srgbClr val="26231F"/>
                           </a:solidFill>
                         </a:rPr>
                         <a:t>입력하세요</a:t>
@@ -4130,30 +4298,30 @@
                   <a:tcPr anchor="ctr" marL="73152" marR="73152">
                     <a:lnL w="9525" cap="flat" cmpd="sng" algn="ctr">
                       <a:solidFill>
-                        <a:srgbClr val="F1D4D0"/>
+                        <a:srgbClr val="F6D9D5"/>
                       </a:solidFill>
                       <a:prstDash val="solid"/>
                     </a:lnL>
                     <a:lnR w="9525" cap="flat" cmpd="sng" algn="ctr">
                       <a:solidFill>
-                        <a:srgbClr val="F1D4D0"/>
+                        <a:srgbClr val="F6D9D5"/>
                       </a:solidFill>
                       <a:prstDash val="solid"/>
                     </a:lnR>
                     <a:lnT w="9525" cap="flat" cmpd="sng" algn="ctr">
                       <a:solidFill>
-                        <a:srgbClr val="F1D4D0"/>
+                        <a:srgbClr val="F6D9D5"/>
                       </a:solidFill>
                       <a:prstDash val="solid"/>
                     </a:lnT>
                     <a:lnB w="9525" cap="flat" cmpd="sng" algn="ctr">
                       <a:solidFill>
-                        <a:srgbClr val="F1D4D0"/>
+                        <a:srgbClr val="F6D9D5"/>
                       </a:solidFill>
                       <a:prstDash val="solid"/>
                     </a:lnB>
                     <a:solidFill>
-                      <a:srgbClr val="FAF1F0"/>
+                      <a:srgbClr val="FBEEEC"/>
                     </a:solidFill>
                   </a:tcPr>
                 </a:tc>
@@ -4168,7 +4336,7 @@
                       <a:r>
                         <a:rPr sz="1400" b="1">
                           <a:solidFill>
-                            <a:srgbClr val="4D2019"/>
+                            <a:srgbClr val="492C27"/>
                           </a:solidFill>
                         </a:rPr>
                         <a:t>주소</a:t>
@@ -4178,30 +4346,30 @@
                   <a:tcPr anchor="ctr" marL="73152" marR="73152">
                     <a:lnL w="9525" cap="flat" cmpd="sng" algn="ctr">
                       <a:solidFill>
-                        <a:srgbClr val="F1D4D0"/>
+                        <a:srgbClr val="F6D9D5"/>
                       </a:solidFill>
                       <a:prstDash val="solid"/>
                     </a:lnL>
                     <a:lnR w="9525" cap="flat" cmpd="sng" algn="ctr">
                       <a:solidFill>
-                        <a:srgbClr val="F1D4D0"/>
+                        <a:srgbClr val="F6D9D5"/>
                       </a:solidFill>
                       <a:prstDash val="solid"/>
                     </a:lnR>
                     <a:lnT w="9525" cap="flat" cmpd="sng" algn="ctr">
                       <a:solidFill>
-                        <a:srgbClr val="F1D4D0"/>
+                        <a:srgbClr val="F6D9D5"/>
                       </a:solidFill>
                       <a:prstDash val="solid"/>
                     </a:lnT>
                     <a:lnB w="9525" cap="flat" cmpd="sng" algn="ctr">
                       <a:solidFill>
-                        <a:srgbClr val="F1D4D0"/>
+                        <a:srgbClr val="F6D9D5"/>
                       </a:solidFill>
                       <a:prstDash val="solid"/>
                     </a:lnB>
                     <a:solidFill>
-                      <a:srgbClr val="F1D4D0"/>
+                      <a:srgbClr val="F6D9D5"/>
                     </a:solidFill>
                   </a:tcPr>
                 </a:tc>
@@ -4214,7 +4382,7 @@
                       <a:r>
                         <a:rPr sz="1400" b="0">
                           <a:solidFill>
-                            <a:srgbClr val="2B2B2B"/>
+                            <a:srgbClr val="26231F"/>
                           </a:solidFill>
                         </a:rPr>
                         <a:t>입력하세요</a:t>
@@ -4224,25 +4392,25 @@
                   <a:tcPr anchor="ctr" marL="73152" marR="73152">
                     <a:lnL w="9525" cap="flat" cmpd="sng" algn="ctr">
                       <a:solidFill>
-                        <a:srgbClr val="F1D4D0"/>
+                        <a:srgbClr val="F6D9D5"/>
                       </a:solidFill>
                       <a:prstDash val="solid"/>
                     </a:lnL>
                     <a:lnR w="9525" cap="flat" cmpd="sng" algn="ctr">
                       <a:solidFill>
-                        <a:srgbClr val="F1D4D0"/>
+                        <a:srgbClr val="F6D9D5"/>
                       </a:solidFill>
                       <a:prstDash val="solid"/>
                     </a:lnR>
                     <a:lnT w="9525" cap="flat" cmpd="sng" algn="ctr">
                       <a:solidFill>
-                        <a:srgbClr val="F1D4D0"/>
+                        <a:srgbClr val="F6D9D5"/>
                       </a:solidFill>
                       <a:prstDash val="solid"/>
                     </a:lnT>
                     <a:lnB w="9525" cap="flat" cmpd="sng" algn="ctr">
                       <a:solidFill>
-                        <a:srgbClr val="F1D4D0"/>
+                        <a:srgbClr val="F6D9D5"/>
                       </a:solidFill>
                       <a:prstDash val="solid"/>
                     </a:lnB>
@@ -4262,7 +4430,7 @@
                       <a:r>
                         <a:rPr sz="1400" b="1">
                           <a:solidFill>
-                            <a:srgbClr val="4D2019"/>
+                            <a:srgbClr val="492C27"/>
                           </a:solidFill>
                         </a:rPr>
                         <a:t>일시</a:t>
@@ -4272,30 +4440,30 @@
                   <a:tcPr anchor="ctr" marL="73152" marR="73152">
                     <a:lnL w="9525" cap="flat" cmpd="sng" algn="ctr">
                       <a:solidFill>
-                        <a:srgbClr val="F1D4D0"/>
+                        <a:srgbClr val="F6D9D5"/>
                       </a:solidFill>
                       <a:prstDash val="solid"/>
                     </a:lnL>
                     <a:lnR w="9525" cap="flat" cmpd="sng" algn="ctr">
                       <a:solidFill>
-                        <a:srgbClr val="F1D4D0"/>
+                        <a:srgbClr val="F6D9D5"/>
                       </a:solidFill>
                       <a:prstDash val="solid"/>
                     </a:lnR>
                     <a:lnT w="9525" cap="flat" cmpd="sng" algn="ctr">
                       <a:solidFill>
-                        <a:srgbClr val="F1D4D0"/>
+                        <a:srgbClr val="F6D9D5"/>
                       </a:solidFill>
                       <a:prstDash val="solid"/>
                     </a:lnT>
                     <a:lnB w="9525" cap="flat" cmpd="sng" algn="ctr">
                       <a:solidFill>
-                        <a:srgbClr val="F1D4D0"/>
+                        <a:srgbClr val="F6D9D5"/>
                       </a:solidFill>
                       <a:prstDash val="solid"/>
                     </a:lnB>
                     <a:solidFill>
-                      <a:srgbClr val="F1D4D0"/>
+                      <a:srgbClr val="F6D9D5"/>
                     </a:solidFill>
                   </a:tcPr>
                 </a:tc>
@@ -4308,7 +4476,7 @@
                       <a:r>
                         <a:rPr sz="1400" b="0">
                           <a:solidFill>
-                            <a:srgbClr val="2B2B2B"/>
+                            <a:srgbClr val="26231F"/>
                           </a:solidFill>
                         </a:rPr>
                         <a:t>입력하세요</a:t>
@@ -4318,30 +4486,30 @@
                   <a:tcPr anchor="ctr" marL="73152" marR="73152">
                     <a:lnL w="9525" cap="flat" cmpd="sng" algn="ctr">
                       <a:solidFill>
-                        <a:srgbClr val="F1D4D0"/>
+                        <a:srgbClr val="F6D9D5"/>
                       </a:solidFill>
                       <a:prstDash val="solid"/>
                     </a:lnL>
                     <a:lnR w="9525" cap="flat" cmpd="sng" algn="ctr">
                       <a:solidFill>
-                        <a:srgbClr val="F1D4D0"/>
+                        <a:srgbClr val="F6D9D5"/>
                       </a:solidFill>
                       <a:prstDash val="solid"/>
                     </a:lnR>
                     <a:lnT w="9525" cap="flat" cmpd="sng" algn="ctr">
                       <a:solidFill>
-                        <a:srgbClr val="F1D4D0"/>
+                        <a:srgbClr val="F6D9D5"/>
                       </a:solidFill>
                       <a:prstDash val="solid"/>
                     </a:lnT>
                     <a:lnB w="9525" cap="flat" cmpd="sng" algn="ctr">
                       <a:solidFill>
-                        <a:srgbClr val="F1D4D0"/>
+                        <a:srgbClr val="F6D9D5"/>
                       </a:solidFill>
                       <a:prstDash val="solid"/>
                     </a:lnB>
                     <a:solidFill>
-                      <a:srgbClr val="FAF1F0"/>
+                      <a:srgbClr val="FBEEEC"/>
                     </a:solidFill>
                   </a:tcPr>
                 </a:tc>
@@ -4356,7 +4524,7 @@
                       <a:r>
                         <a:rPr sz="1400" b="1">
                           <a:solidFill>
-                            <a:srgbClr val="4D2019"/>
+                            <a:srgbClr val="492C27"/>
                           </a:solidFill>
                         </a:rPr>
                         <a:t>연락처</a:t>
@@ -4366,30 +4534,30 @@
                   <a:tcPr anchor="ctr" marL="73152" marR="73152">
                     <a:lnL w="9525" cap="flat" cmpd="sng" algn="ctr">
                       <a:solidFill>
-                        <a:srgbClr val="F1D4D0"/>
+                        <a:srgbClr val="F6D9D5"/>
                       </a:solidFill>
                       <a:prstDash val="solid"/>
                     </a:lnL>
                     <a:lnR w="9525" cap="flat" cmpd="sng" algn="ctr">
                       <a:solidFill>
-                        <a:srgbClr val="F1D4D0"/>
+                        <a:srgbClr val="F6D9D5"/>
                       </a:solidFill>
                       <a:prstDash val="solid"/>
                     </a:lnR>
                     <a:lnT w="9525" cap="flat" cmpd="sng" algn="ctr">
                       <a:solidFill>
-                        <a:srgbClr val="F1D4D0"/>
+                        <a:srgbClr val="F6D9D5"/>
                       </a:solidFill>
                       <a:prstDash val="solid"/>
                     </a:lnT>
                     <a:lnB w="9525" cap="flat" cmpd="sng" algn="ctr">
                       <a:solidFill>
-                        <a:srgbClr val="F1D4D0"/>
+                        <a:srgbClr val="F6D9D5"/>
                       </a:solidFill>
                       <a:prstDash val="solid"/>
                     </a:lnB>
                     <a:solidFill>
-                      <a:srgbClr val="F1D4D0"/>
+                      <a:srgbClr val="F6D9D5"/>
                     </a:solidFill>
                   </a:tcPr>
                 </a:tc>
@@ -4402,7 +4570,7 @@
                       <a:r>
                         <a:rPr sz="1400" b="0">
                           <a:solidFill>
-                            <a:srgbClr val="2B2B2B"/>
+                            <a:srgbClr val="26231F"/>
                           </a:solidFill>
                         </a:rPr>
                         <a:t>입력하세요</a:t>
@@ -4412,25 +4580,25 @@
                   <a:tcPr anchor="ctr" marL="73152" marR="73152">
                     <a:lnL w="9525" cap="flat" cmpd="sng" algn="ctr">
                       <a:solidFill>
-                        <a:srgbClr val="F1D4D0"/>
+                        <a:srgbClr val="F6D9D5"/>
                       </a:solidFill>
                       <a:prstDash val="solid"/>
                     </a:lnL>
                     <a:lnR w="9525" cap="flat" cmpd="sng" algn="ctr">
                       <a:solidFill>
-                        <a:srgbClr val="F1D4D0"/>
+                        <a:srgbClr val="F6D9D5"/>
                       </a:solidFill>
                       <a:prstDash val="solid"/>
                     </a:lnR>
                     <a:lnT w="9525" cap="flat" cmpd="sng" algn="ctr">
                       <a:solidFill>
-                        <a:srgbClr val="F1D4D0"/>
+                        <a:srgbClr val="F6D9D5"/>
                       </a:solidFill>
                       <a:prstDash val="solid"/>
                     </a:lnT>
                     <a:lnB w="9525" cap="flat" cmpd="sng" algn="ctr">
                       <a:solidFill>
-                        <a:srgbClr val="F1D4D0"/>
+                        <a:srgbClr val="F6D9D5"/>
                       </a:solidFill>
                       <a:prstDash val="solid"/>
                     </a:lnB>
@@ -4458,7 +4626,7 @@
     <p:bg>
       <p:bgPr>
         <a:solidFill>
-          <a:srgbClr val="FAF1F0"/>
+          <a:srgbClr val="F6D9D5"/>
         </a:solidFill>
         <a:effectLst/>
       </p:bgPr>
@@ -4478,14 +4646,14 @@
         </p:nvSpPr>
         <p:spPr>
           <a:xfrm>
-            <a:off x="0" y="6035040"/>
-            <a:ext cx="1737360" cy="822960"/>
-          </a:xfrm>
-          <a:prstGeom prst="rtTriangle">
+            <a:off x="10180015" y="-1645920"/>
+            <a:ext cx="3474720" cy="3474720"/>
+          </a:xfrm>
+          <a:prstGeom prst="ellipse">
             <a:avLst/>
           </a:prstGeom>
           <a:solidFill>
-            <a:srgbClr val="F1D4D0"/>
+            <a:srgbClr val="EBB6AD"/>
           </a:solidFill>
           <a:ln>
             <a:noFill/>
@@ -4501,20 +4669,58 @@
       </p:sp>
       <p:sp>
         <p:nvSpPr>
-          <p:cNvPr id="4" name="장식"/>
+          <p:cNvPr id="4" name="상단 라벨"/>
+          <p:cNvSpPr txBox="1"/>
+          <p:nvPr/>
+        </p:nvSpPr>
+        <p:spPr>
+          <a:xfrm>
+            <a:off x="640080" y="274320"/>
+            <a:ext cx="5486400" cy="274320"/>
+          </a:xfrm>
+          <a:prstGeom prst="rect">
+            <a:avLst/>
+          </a:prstGeom>
+          <a:noFill/>
+        </p:spPr>
+        <p:txBody>
+          <a:bodyPr wrap="square" lIns="54864" rIns="54864" tIns="27432" bIns="27432" anchor="ctr">
+            <a:noAutofit/>
+          </a:bodyPr>
+          <a:lstStyle/>
+          <a:p>
+            <a:pPr algn="l">
+              <a:lnSpc>
+                <a:spcPct val="115000"/>
+              </a:lnSpc>
+            </a:pPr>
+            <a:r>
+              <a:rPr sz="900" b="1" i="0" spc="250">
+                <a:solidFill>
+                  <a:srgbClr val="26231F"/>
+                </a:solidFill>
+              </a:rPr>
+              <a:t>WEDDING</a:t>
+            </a:r>
+          </a:p>
+        </p:txBody>
+      </p:sp>
+      <p:sp>
+        <p:nvSpPr>
+          <p:cNvPr id="5" name="포인트"/>
           <p:cNvSpPr/>
           <p:nvPr/>
         </p:nvSpPr>
         <p:spPr>
           <a:xfrm>
-            <a:off x="0" y="6400800"/>
-            <a:ext cx="914400" cy="457200"/>
-          </a:xfrm>
-          <a:prstGeom prst="rtTriangle">
+            <a:off x="11048695" y="502919"/>
+            <a:ext cx="274320" cy="274320"/>
+          </a:xfrm>
+          <a:prstGeom prst="sun">
             <a:avLst/>
           </a:prstGeom>
           <a:solidFill>
-            <a:srgbClr val="994133"/>
+            <a:srgbClr val="FFFFFF"/>
           </a:solidFill>
           <a:ln>
             <a:noFill/>
@@ -4540,8 +4746,8 @@
         </p:nvSpPr>
         <p:spPr>
           <a:xfrm>
-            <a:off x="640080" y="457200"/>
-            <a:ext cx="9722815" cy="868680"/>
+            <a:off x="640080" y="658368"/>
+            <a:ext cx="9082735" cy="868680"/>
           </a:xfrm>
         </p:spPr>
         <p:txBody>
@@ -4558,7 +4764,7 @@
             <a:r>
               <a:rPr sz="3000" b="1" i="0">
                 <a:solidFill>
-                  <a:srgbClr val="4D2019"/>
+                  <a:srgbClr val="26231F"/>
                 </a:solidFill>
               </a:rPr>
               <a:t>교통 안내</a:t>
@@ -4568,27 +4774,25 @@
       </p:sp>
       <p:sp>
         <p:nvSpPr>
-          <p:cNvPr id="5" name="카드 1"/>
+          <p:cNvPr id="6" name="카드 1"/>
           <p:cNvSpPr/>
           <p:nvPr/>
         </p:nvSpPr>
         <p:spPr>
           <a:xfrm>
-            <a:off x="640080" y="1600200"/>
-            <a:ext cx="3484778" cy="4800600"/>
+            <a:off x="640080" y="1783080"/>
+            <a:ext cx="3484778" cy="4572000"/>
           </a:xfrm>
           <a:prstGeom prst="roundRect">
             <a:avLst>
-              <a:gd name="adj" fmla="val 8000"/>
+              <a:gd name="adj" fmla="val 4000"/>
             </a:avLst>
           </a:prstGeom>
           <a:solidFill>
-            <a:srgbClr val="FAF1F0"/>
+            <a:srgbClr val="FBEEEC"/>
           </a:solidFill>
-          <a:ln w="15875">
-            <a:solidFill>
-              <a:srgbClr val="F1D4D0"/>
-            </a:solidFill>
+          <a:ln>
+            <a:noFill/>
           </a:ln>
         </p:spPr>
         <p:txBody>
@@ -4601,20 +4805,49 @@
       </p:sp>
       <p:sp>
         <p:nvSpPr>
-          <p:cNvPr id="6" name="번호 1"/>
+          <p:cNvPr id="7" name="포인트 막대"/>
           <p:cNvSpPr/>
           <p:nvPr/>
         </p:nvSpPr>
         <p:spPr>
           <a:xfrm>
-            <a:off x="822959" y="1783080"/>
+            <a:off x="640080" y="1892807"/>
+            <a:ext cx="54864" cy="4352544"/>
+          </a:xfrm>
+          <a:prstGeom prst="rect">
+            <a:avLst/>
+          </a:prstGeom>
+          <a:solidFill>
+            <a:srgbClr val="D88579"/>
+          </a:solidFill>
+          <a:ln>
+            <a:noFill/>
+          </a:ln>
+        </p:spPr>
+        <p:txBody>
+          <a:bodyPr rtlCol="0" anchor="ctr"/>
+          <a:lstStyle/>
+          <a:p>
+            <a:pPr algn="ctr"/>
+          </a:p>
+        </p:txBody>
+      </p:sp>
+      <p:sp>
+        <p:nvSpPr>
+          <p:cNvPr id="8" name="번호 1"/>
+          <p:cNvSpPr/>
+          <p:nvPr/>
+        </p:nvSpPr>
+        <p:spPr>
+          <a:xfrm>
+            <a:off x="822959" y="1965960"/>
             <a:ext cx="457200" cy="457200"/>
           </a:xfrm>
           <a:prstGeom prst="ellipse">
             <a:avLst/>
           </a:prstGeom>
           <a:solidFill>
-            <a:srgbClr val="994133"/>
+            <a:srgbClr val="E1C498"/>
           </a:solidFill>
           <a:ln>
             <a:noFill/>
@@ -4634,7 +4867,7 @@
             <a:r>
               <a:rPr sz="1600" b="1" i="0">
                 <a:solidFill>
-                  <a:srgbClr val="FFFFFF"/>
+                  <a:srgbClr val="26231F"/>
                 </a:solidFill>
               </a:rPr>
               <a:t>1</a:t>
@@ -4644,13 +4877,13 @@
       </p:sp>
       <p:sp>
         <p:nvSpPr>
-          <p:cNvPr id="7" name="TextBox 6"/>
+          <p:cNvPr id="9" name="TextBox 8"/>
           <p:cNvSpPr txBox="1"/>
           <p:nvPr/>
         </p:nvSpPr>
         <p:spPr>
           <a:xfrm>
-            <a:off x="777240" y="2377440"/>
+            <a:off x="777240" y="2560320"/>
             <a:ext cx="3210458" cy="640080"/>
           </a:xfrm>
           <a:prstGeom prst="rect">
@@ -4672,7 +4905,7 @@
             <a:r>
               <a:rPr sz="1800" b="1" i="0">
                 <a:solidFill>
-                  <a:srgbClr val="4D2019"/>
+                  <a:srgbClr val="492C27"/>
                 </a:solidFill>
               </a:rPr>
               <a:t>지하철</a:t>
@@ -4682,14 +4915,14 @@
       </p:sp>
       <p:sp>
         <p:nvSpPr>
-          <p:cNvPr id="8" name="TextBox 7"/>
+          <p:cNvPr id="10" name="TextBox 9"/>
           <p:cNvSpPr txBox="1"/>
           <p:nvPr/>
         </p:nvSpPr>
         <p:spPr>
           <a:xfrm>
-            <a:off x="777240" y="3063240"/>
-            <a:ext cx="3210458" cy="3200400"/>
+            <a:off x="777240" y="3246120"/>
+            <a:ext cx="3210458" cy="2971800"/>
           </a:xfrm>
           <a:prstGeom prst="rect">
             <a:avLst/>
@@ -4710,7 +4943,7 @@
             <a:r>
               <a:rPr sz="1500" b="0" i="0">
                 <a:solidFill>
-                  <a:srgbClr val="2B2B2B"/>
+                  <a:srgbClr val="26231F"/>
                 </a:solidFill>
               </a:rPr>
               <a:t>입력하세요</a:t>
@@ -4720,27 +4953,25 @@
       </p:sp>
       <p:sp>
         <p:nvSpPr>
-          <p:cNvPr id="9" name="카드 2"/>
+          <p:cNvPr id="11" name="카드 2"/>
           <p:cNvSpPr/>
           <p:nvPr/>
         </p:nvSpPr>
         <p:spPr>
           <a:xfrm>
-            <a:off x="4353458" y="1600200"/>
-            <a:ext cx="3484778" cy="4800600"/>
+            <a:off x="4353458" y="1783080"/>
+            <a:ext cx="3484778" cy="4572000"/>
           </a:xfrm>
           <a:prstGeom prst="roundRect">
             <a:avLst>
-              <a:gd name="adj" fmla="val 8000"/>
+              <a:gd name="adj" fmla="val 4000"/>
             </a:avLst>
           </a:prstGeom>
           <a:solidFill>
-            <a:srgbClr val="FAF1F0"/>
+            <a:srgbClr val="FBEEEC"/>
           </a:solidFill>
-          <a:ln w="15875">
-            <a:solidFill>
-              <a:srgbClr val="F1D4D0"/>
-            </a:solidFill>
+          <a:ln>
+            <a:noFill/>
           </a:ln>
         </p:spPr>
         <p:txBody>
@@ -4753,20 +4984,49 @@
       </p:sp>
       <p:sp>
         <p:nvSpPr>
-          <p:cNvPr id="10" name="번호 2"/>
+          <p:cNvPr id="12" name="포인트 막대"/>
           <p:cNvSpPr/>
           <p:nvPr/>
         </p:nvSpPr>
         <p:spPr>
           <a:xfrm>
-            <a:off x="4536338" y="1783080"/>
+            <a:off x="4353458" y="1892807"/>
+            <a:ext cx="54864" cy="4352544"/>
+          </a:xfrm>
+          <a:prstGeom prst="rect">
+            <a:avLst/>
+          </a:prstGeom>
+          <a:solidFill>
+            <a:srgbClr val="D88579"/>
+          </a:solidFill>
+          <a:ln>
+            <a:noFill/>
+          </a:ln>
+        </p:spPr>
+        <p:txBody>
+          <a:bodyPr rtlCol="0" anchor="ctr"/>
+          <a:lstStyle/>
+          <a:p>
+            <a:pPr algn="ctr"/>
+          </a:p>
+        </p:txBody>
+      </p:sp>
+      <p:sp>
+        <p:nvSpPr>
+          <p:cNvPr id="13" name="번호 2"/>
+          <p:cNvSpPr/>
+          <p:nvPr/>
+        </p:nvSpPr>
+        <p:spPr>
+          <a:xfrm>
+            <a:off x="4536338" y="1965960"/>
             <a:ext cx="457200" cy="457200"/>
           </a:xfrm>
           <a:prstGeom prst="ellipse">
             <a:avLst/>
           </a:prstGeom>
           <a:solidFill>
-            <a:srgbClr val="994133"/>
+            <a:srgbClr val="E1C498"/>
           </a:solidFill>
           <a:ln>
             <a:noFill/>
@@ -4786,7 +5046,7 @@
             <a:r>
               <a:rPr sz="1600" b="1" i="0">
                 <a:solidFill>
-                  <a:srgbClr val="FFFFFF"/>
+                  <a:srgbClr val="26231F"/>
                 </a:solidFill>
               </a:rPr>
               <a:t>2</a:t>
@@ -4796,13 +5056,13 @@
       </p:sp>
       <p:sp>
         <p:nvSpPr>
-          <p:cNvPr id="11" name="TextBox 10"/>
+          <p:cNvPr id="14" name="TextBox 13"/>
           <p:cNvSpPr txBox="1"/>
           <p:nvPr/>
         </p:nvSpPr>
         <p:spPr>
           <a:xfrm>
-            <a:off x="4490618" y="2377440"/>
+            <a:off x="4490618" y="2560320"/>
             <a:ext cx="3210458" cy="640080"/>
           </a:xfrm>
           <a:prstGeom prst="rect">
@@ -4824,7 +5084,7 @@
             <a:r>
               <a:rPr sz="1800" b="1" i="0">
                 <a:solidFill>
-                  <a:srgbClr val="4D2019"/>
+                  <a:srgbClr val="492C27"/>
                 </a:solidFill>
               </a:rPr>
               <a:t>버스</a:t>
@@ -4834,14 +5094,14 @@
       </p:sp>
       <p:sp>
         <p:nvSpPr>
-          <p:cNvPr id="12" name="TextBox 11"/>
+          <p:cNvPr id="15" name="TextBox 14"/>
           <p:cNvSpPr txBox="1"/>
           <p:nvPr/>
         </p:nvSpPr>
         <p:spPr>
           <a:xfrm>
-            <a:off x="4490618" y="3063240"/>
-            <a:ext cx="3210458" cy="3200400"/>
+            <a:off x="4490618" y="3246120"/>
+            <a:ext cx="3210458" cy="2971800"/>
           </a:xfrm>
           <a:prstGeom prst="rect">
             <a:avLst/>
@@ -4862,7 +5122,7 @@
             <a:r>
               <a:rPr sz="1500" b="0" i="0">
                 <a:solidFill>
-                  <a:srgbClr val="2B2B2B"/>
+                  <a:srgbClr val="26231F"/>
                 </a:solidFill>
               </a:rPr>
               <a:t>입력하세요</a:t>
@@ -4872,27 +5132,25 @@
       </p:sp>
       <p:sp>
         <p:nvSpPr>
-          <p:cNvPr id="13" name="카드 3"/>
+          <p:cNvPr id="16" name="카드 3"/>
           <p:cNvSpPr/>
           <p:nvPr/>
         </p:nvSpPr>
         <p:spPr>
           <a:xfrm>
-            <a:off x="8066836" y="1600200"/>
-            <a:ext cx="3484778" cy="4800600"/>
+            <a:off x="8066836" y="1783080"/>
+            <a:ext cx="3484778" cy="4572000"/>
           </a:xfrm>
           <a:prstGeom prst="roundRect">
             <a:avLst>
-              <a:gd name="adj" fmla="val 8000"/>
+              <a:gd name="adj" fmla="val 4000"/>
             </a:avLst>
           </a:prstGeom>
           <a:solidFill>
-            <a:srgbClr val="FAF1F0"/>
+            <a:srgbClr val="FBEEEC"/>
           </a:solidFill>
-          <a:ln w="15875">
-            <a:solidFill>
-              <a:srgbClr val="F1D4D0"/>
-            </a:solidFill>
+          <a:ln>
+            <a:noFill/>
           </a:ln>
         </p:spPr>
         <p:txBody>
@@ -4905,20 +5163,49 @@
       </p:sp>
       <p:sp>
         <p:nvSpPr>
-          <p:cNvPr id="14" name="번호 3"/>
+          <p:cNvPr id="17" name="포인트 막대"/>
           <p:cNvSpPr/>
           <p:nvPr/>
         </p:nvSpPr>
         <p:spPr>
           <a:xfrm>
-            <a:off x="8249716" y="1783080"/>
+            <a:off x="8066836" y="1892807"/>
+            <a:ext cx="54864" cy="4352544"/>
+          </a:xfrm>
+          <a:prstGeom prst="rect">
+            <a:avLst/>
+          </a:prstGeom>
+          <a:solidFill>
+            <a:srgbClr val="D88579"/>
+          </a:solidFill>
+          <a:ln>
+            <a:noFill/>
+          </a:ln>
+        </p:spPr>
+        <p:txBody>
+          <a:bodyPr rtlCol="0" anchor="ctr"/>
+          <a:lstStyle/>
+          <a:p>
+            <a:pPr algn="ctr"/>
+          </a:p>
+        </p:txBody>
+      </p:sp>
+      <p:sp>
+        <p:nvSpPr>
+          <p:cNvPr id="18" name="번호 3"/>
+          <p:cNvSpPr/>
+          <p:nvPr/>
+        </p:nvSpPr>
+        <p:spPr>
+          <a:xfrm>
+            <a:off x="8249716" y="1965960"/>
             <a:ext cx="457200" cy="457200"/>
           </a:xfrm>
           <a:prstGeom prst="ellipse">
             <a:avLst/>
           </a:prstGeom>
           <a:solidFill>
-            <a:srgbClr val="994133"/>
+            <a:srgbClr val="E1C498"/>
           </a:solidFill>
           <a:ln>
             <a:noFill/>
@@ -4938,7 +5225,7 @@
             <a:r>
               <a:rPr sz="1600" b="1" i="0">
                 <a:solidFill>
-                  <a:srgbClr val="FFFFFF"/>
+                  <a:srgbClr val="26231F"/>
                 </a:solidFill>
               </a:rPr>
               <a:t>3</a:t>
@@ -4948,13 +5235,13 @@
       </p:sp>
       <p:sp>
         <p:nvSpPr>
-          <p:cNvPr id="15" name="TextBox 14"/>
+          <p:cNvPr id="19" name="TextBox 18"/>
           <p:cNvSpPr txBox="1"/>
           <p:nvPr/>
         </p:nvSpPr>
         <p:spPr>
           <a:xfrm>
-            <a:off x="8203996" y="2377440"/>
+            <a:off x="8203996" y="2560320"/>
             <a:ext cx="3210458" cy="640080"/>
           </a:xfrm>
           <a:prstGeom prst="rect">
@@ -4976,7 +5263,7 @@
             <a:r>
               <a:rPr sz="1800" b="1" i="0">
                 <a:solidFill>
-                  <a:srgbClr val="4D2019"/>
+                  <a:srgbClr val="492C27"/>
                 </a:solidFill>
               </a:rPr>
               <a:t>자가용 · 주차</a:t>
@@ -4986,14 +5273,14 @@
       </p:sp>
       <p:sp>
         <p:nvSpPr>
-          <p:cNvPr id="16" name="TextBox 15"/>
+          <p:cNvPr id="20" name="TextBox 19"/>
           <p:cNvSpPr txBox="1"/>
           <p:nvPr/>
         </p:nvSpPr>
         <p:spPr>
           <a:xfrm>
-            <a:off x="8203996" y="3063240"/>
-            <a:ext cx="3210458" cy="3200400"/>
+            <a:off x="8203996" y="3246120"/>
+            <a:ext cx="3210458" cy="2971800"/>
           </a:xfrm>
           <a:prstGeom prst="rect">
             <a:avLst/>
@@ -5014,7 +5301,7 @@
             <a:r>
               <a:rPr sz="1500" b="0" i="0">
                 <a:solidFill>
-                  <a:srgbClr val="2B2B2B"/>
+                  <a:srgbClr val="26231F"/>
                 </a:solidFill>
               </a:rPr>
               <a:t>입력하세요</a:t>
@@ -5036,7 +5323,7 @@
     <p:bg>
       <p:bgPr>
         <a:solidFill>
-          <a:srgbClr val="FAF1F0"/>
+          <a:srgbClr val="F6D9D5"/>
         </a:solidFill>
         <a:effectLst/>
       </p:bgPr>
@@ -5056,14 +5343,14 @@
         </p:nvSpPr>
         <p:spPr>
           <a:xfrm>
-            <a:off x="0" y="6035040"/>
-            <a:ext cx="1737360" cy="822960"/>
-          </a:xfrm>
-          <a:prstGeom prst="rtTriangle">
+            <a:off x="10180015" y="-1645920"/>
+            <a:ext cx="3474720" cy="3474720"/>
+          </a:xfrm>
+          <a:prstGeom prst="ellipse">
             <a:avLst/>
           </a:prstGeom>
           <a:solidFill>
-            <a:srgbClr val="F1D4D0"/>
+            <a:srgbClr val="EBB6AD"/>
           </a:solidFill>
           <a:ln>
             <a:noFill/>
@@ -5079,20 +5366,58 @@
       </p:sp>
       <p:sp>
         <p:nvSpPr>
-          <p:cNvPr id="4" name="장식"/>
+          <p:cNvPr id="4" name="상단 라벨"/>
+          <p:cNvSpPr txBox="1"/>
+          <p:nvPr/>
+        </p:nvSpPr>
+        <p:spPr>
+          <a:xfrm>
+            <a:off x="640080" y="274320"/>
+            <a:ext cx="5486400" cy="274320"/>
+          </a:xfrm>
+          <a:prstGeom prst="rect">
+            <a:avLst/>
+          </a:prstGeom>
+          <a:noFill/>
+        </p:spPr>
+        <p:txBody>
+          <a:bodyPr wrap="square" lIns="54864" rIns="54864" tIns="27432" bIns="27432" anchor="ctr">
+            <a:noAutofit/>
+          </a:bodyPr>
+          <a:lstStyle/>
+          <a:p>
+            <a:pPr algn="l">
+              <a:lnSpc>
+                <a:spcPct val="115000"/>
+              </a:lnSpc>
+            </a:pPr>
+            <a:r>
+              <a:rPr sz="900" b="1" i="0" spc="250">
+                <a:solidFill>
+                  <a:srgbClr val="26231F"/>
+                </a:solidFill>
+              </a:rPr>
+              <a:t>WEDDING</a:t>
+            </a:r>
+          </a:p>
+        </p:txBody>
+      </p:sp>
+      <p:sp>
+        <p:nvSpPr>
+          <p:cNvPr id="5" name="포인트"/>
           <p:cNvSpPr/>
           <p:nvPr/>
         </p:nvSpPr>
         <p:spPr>
           <a:xfrm>
-            <a:off x="0" y="6400800"/>
-            <a:ext cx="914400" cy="457200"/>
-          </a:xfrm>
-          <a:prstGeom prst="rtTriangle">
+            <a:off x="11048695" y="502919"/>
+            <a:ext cx="274320" cy="274320"/>
+          </a:xfrm>
+          <a:prstGeom prst="sun">
             <a:avLst/>
           </a:prstGeom>
           <a:solidFill>
-            <a:srgbClr val="994133"/>
+            <a:srgbClr val="FFFFFF"/>
           </a:solidFill>
           <a:ln>
             <a:noFill/>
@@ -5118,8 +5443,8 @@
         </p:nvSpPr>
         <p:spPr>
           <a:xfrm>
-            <a:off x="640080" y="457200"/>
-            <a:ext cx="9722815" cy="868680"/>
+            <a:off x="640080" y="658368"/>
+            <a:ext cx="9082735" cy="868680"/>
           </a:xfrm>
         </p:spPr>
         <p:txBody>
@@ -5136,7 +5461,7 @@
             <a:r>
               <a:rPr sz="3000" b="1" i="0">
                 <a:solidFill>
-                  <a:srgbClr val="4D2019"/>
+                  <a:srgbClr val="26231F"/>
                 </a:solidFill>
               </a:rPr>
               <a:t>웨딩 사진</a:t>
@@ -5146,14 +5471,14 @@
       </p:sp>
       <p:sp>
         <p:nvSpPr>
-          <p:cNvPr id="5" name="사진 자리"/>
+          <p:cNvPr id="6" name="사진 자리"/>
           <p:cNvSpPr/>
           <p:nvPr/>
         </p:nvSpPr>
         <p:spPr>
           <a:xfrm>
-            <a:off x="640080" y="1600200"/>
-            <a:ext cx="3515258" cy="2308860"/>
+            <a:off x="640080" y="1783080"/>
+            <a:ext cx="3515258" cy="2194560"/>
           </a:xfrm>
           <a:prstGeom prst="roundRect">
             <a:avLst>
@@ -5161,12 +5486,10 @@
             </a:avLst>
           </a:prstGeom>
           <a:solidFill>
-            <a:srgbClr val="F1D4D0"/>
+            <a:srgbClr val="F6D9D5"/>
           </a:solidFill>
           <a:ln w="19050">
-            <a:solidFill>
-              <a:srgbClr val="994133"/>
-            </a:solidFill>
+            <a:noFill/>
             <a:prstDash val="dash"/>
           </a:ln>
         </p:spPr>
@@ -5184,7 +5507,7 @@
             <a:r>
               <a:rPr sz="1200" b="0" i="0">
                 <a:solidFill>
-                  <a:srgbClr val="4D2019"/>
+                  <a:srgbClr val="8E8780"/>
                 </a:solidFill>
               </a:rPr>
               <a:t>사진 1</a:t>
@@ -5194,14 +5517,14 @@
       </p:sp>
       <p:sp>
         <p:nvSpPr>
-          <p:cNvPr id="6" name="사진 자리"/>
+          <p:cNvPr id="7" name="사진 자리"/>
           <p:cNvSpPr/>
           <p:nvPr/>
         </p:nvSpPr>
         <p:spPr>
           <a:xfrm>
-            <a:off x="4338218" y="1600200"/>
-            <a:ext cx="3515258" cy="2308860"/>
+            <a:off x="4338218" y="1783080"/>
+            <a:ext cx="3515258" cy="2194560"/>
           </a:xfrm>
           <a:prstGeom prst="roundRect">
             <a:avLst>
@@ -5209,12 +5532,10 @@
             </a:avLst>
           </a:prstGeom>
           <a:solidFill>
-            <a:srgbClr val="F1D4D0"/>
+            <a:srgbClr val="F6D9D5"/>
           </a:solidFill>
           <a:ln w="19050">
-            <a:solidFill>
-              <a:srgbClr val="994133"/>
-            </a:solidFill>
+            <a:noFill/>
             <a:prstDash val="dash"/>
           </a:ln>
         </p:spPr>
@@ -5232,7 +5553,7 @@
             <a:r>
               <a:rPr sz="1200" b="0" i="0">
                 <a:solidFill>
-                  <a:srgbClr val="4D2019"/>
+                  <a:srgbClr val="8E8780"/>
                 </a:solidFill>
               </a:rPr>
               <a:t>사진 2</a:t>
@@ -5242,14 +5563,14 @@
       </p:sp>
       <p:sp>
         <p:nvSpPr>
-          <p:cNvPr id="7" name="사진 자리"/>
+          <p:cNvPr id="8" name="사진 자리"/>
           <p:cNvSpPr/>
           <p:nvPr/>
         </p:nvSpPr>
         <p:spPr>
           <a:xfrm>
-            <a:off x="8036356" y="1600200"/>
-            <a:ext cx="3515258" cy="2308860"/>
+            <a:off x="8036356" y="1783080"/>
+            <a:ext cx="3515258" cy="2194560"/>
           </a:xfrm>
           <a:prstGeom prst="roundRect">
             <a:avLst>
@@ -5257,12 +5578,10 @@
             </a:avLst>
           </a:prstGeom>
           <a:solidFill>
-            <a:srgbClr val="F1D4D0"/>
+            <a:srgbClr val="F6D9D5"/>
           </a:solidFill>
           <a:ln w="19050">
-            <a:solidFill>
-              <a:srgbClr val="994133"/>
-            </a:solidFill>
+            <a:noFill/>
             <a:prstDash val="dash"/>
           </a:ln>
         </p:spPr>
@@ -5280,7 +5599,7 @@
             <a:r>
               <a:rPr sz="1200" b="0" i="0">
                 <a:solidFill>
-                  <a:srgbClr val="4D2019"/>
+                  <a:srgbClr val="8E8780"/>
                 </a:solidFill>
               </a:rPr>
               <a:t>사진 3</a:t>
@@ -5290,14 +5609,14 @@
       </p:sp>
       <p:sp>
         <p:nvSpPr>
-          <p:cNvPr id="8" name="사진 자리"/>
+          <p:cNvPr id="9" name="사진 자리"/>
           <p:cNvSpPr/>
           <p:nvPr/>
         </p:nvSpPr>
         <p:spPr>
           <a:xfrm>
-            <a:off x="640080" y="4091939"/>
-            <a:ext cx="3515258" cy="2308860"/>
+            <a:off x="640080" y="4160520"/>
+            <a:ext cx="3515258" cy="2194560"/>
           </a:xfrm>
           <a:prstGeom prst="roundRect">
             <a:avLst>
@@ -5305,12 +5624,10 @@
             </a:avLst>
           </a:prstGeom>
           <a:solidFill>
-            <a:srgbClr val="F1D4D0"/>
+            <a:srgbClr val="F6D9D5"/>
           </a:solidFill>
           <a:ln w="19050">
-            <a:solidFill>
-              <a:srgbClr val="994133"/>
-            </a:solidFill>
+            <a:noFill/>
             <a:prstDash val="dash"/>
           </a:ln>
         </p:spPr>
@@ -5328,7 +5645,7 @@
             <a:r>
               <a:rPr sz="1200" b="0" i="0">
                 <a:solidFill>
-                  <a:srgbClr val="4D2019"/>
+                  <a:srgbClr val="8E8780"/>
                 </a:solidFill>
               </a:rPr>
               <a:t>사진 4</a:t>
@@ -5338,14 +5655,14 @@
       </p:sp>
       <p:sp>
         <p:nvSpPr>
-          <p:cNvPr id="9" name="사진 자리"/>
+          <p:cNvPr id="10" name="사진 자리"/>
           <p:cNvSpPr/>
           <p:nvPr/>
         </p:nvSpPr>
         <p:spPr>
           <a:xfrm>
-            <a:off x="4338218" y="4091939"/>
-            <a:ext cx="3515258" cy="2308860"/>
+            <a:off x="4338218" y="4160520"/>
+            <a:ext cx="3515258" cy="2194560"/>
           </a:xfrm>
           <a:prstGeom prst="roundRect">
             <a:avLst>
@@ -5353,12 +5670,10 @@
             </a:avLst>
           </a:prstGeom>
           <a:solidFill>
-            <a:srgbClr val="F1D4D0"/>
+            <a:srgbClr val="F6D9D5"/>
           </a:solidFill>
           <a:ln w="19050">
-            <a:solidFill>
-              <a:srgbClr val="994133"/>
-            </a:solidFill>
+            <a:noFill/>
             <a:prstDash val="dash"/>
           </a:ln>
         </p:spPr>
@@ -5376,7 +5691,7 @@
             <a:r>
               <a:rPr sz="1200" b="0" i="0">
                 <a:solidFill>
-                  <a:srgbClr val="4D2019"/>
+                  <a:srgbClr val="8E8780"/>
                 </a:solidFill>
               </a:rPr>
               <a:t>사진 5</a:t>
@@ -5386,14 +5701,14 @@
       </p:sp>
       <p:sp>
         <p:nvSpPr>
-          <p:cNvPr id="10" name="사진 자리"/>
+          <p:cNvPr id="11" name="사진 자리"/>
           <p:cNvSpPr/>
           <p:nvPr/>
         </p:nvSpPr>
         <p:spPr>
           <a:xfrm>
-            <a:off x="8036356" y="4091939"/>
-            <a:ext cx="3515258" cy="2308860"/>
+            <a:off x="8036356" y="4160520"/>
+            <a:ext cx="3515258" cy="2194560"/>
           </a:xfrm>
           <a:prstGeom prst="roundRect">
             <a:avLst>
@@ -5401,12 +5716,10 @@
             </a:avLst>
           </a:prstGeom>
           <a:solidFill>
-            <a:srgbClr val="F1D4D0"/>
+            <a:srgbClr val="F6D9D5"/>
           </a:solidFill>
           <a:ln w="19050">
-            <a:solidFill>
-              <a:srgbClr val="994133"/>
-            </a:solidFill>
+            <a:noFill/>
             <a:prstDash val="dash"/>
           </a:ln>
         </p:spPr>
@@ -5424,7 +5737,7 @@
             <a:r>
               <a:rPr sz="1200" b="0" i="0">
                 <a:solidFill>
-                  <a:srgbClr val="4D2019"/>
+                  <a:srgbClr val="8E8780"/>
                 </a:solidFill>
               </a:rPr>
               <a:t>사진 6</a:t>
@@ -5443,6 +5756,14 @@
 <file path=ppt/slides/slide6.xml><?xml version="1.0" encoding="utf-8"?>
 <p:sld xmlns:a="http://schemas.openxmlformats.org/drawingml/2006/main" xmlns:p="http://schemas.openxmlformats.org/presentationml/2006/main" xmlns:r="http://schemas.openxmlformats.org/officeDocument/2006/relationships">
   <p:cSld>
+    <p:bg>
+      <p:bgPr>
+        <a:solidFill>
+          <a:srgbClr val="FBEEEC"/>
+        </a:solidFill>
+        <a:effectLst/>
+      </p:bgPr>
+    </p:bg>
     <p:spTree>
       <p:nvGrpSpPr>
         <p:cNvPr id="1" name=""/>
@@ -5450,30 +5771,120 @@
         <p:nvPr/>
       </p:nvGrpSpPr>
       <p:grpSpPr/>
-      <p:pic>
-        <p:nvPicPr>
-          <p:cNvPr id="3" name="표지 그림" descr="wedding-34.jpg"/>
-          <p:cNvPicPr>
-            <a:picLocks noChangeAspect="1"/>
-          </p:cNvPicPr>
+      <p:sp>
+        <p:nvSpPr>
+          <p:cNvPr id="3" name="사진 자리"/>
+          <p:cNvSpPr/>
           <p:nvPr/>
-        </p:nvPicPr>
-        <p:blipFill>
-          <a:blip r:embed="rId2"/>
-          <a:stretch>
-            <a:fillRect/>
-          </a:stretch>
-        </p:blipFill>
-        <p:spPr>
-          <a:xfrm>
-            <a:off x="0" y="0"/>
-            <a:ext cx="12191695" cy="6858000"/>
+        </p:nvSpPr>
+        <p:spPr>
+          <a:xfrm>
+            <a:off x="1463003" y="960120"/>
+            <a:ext cx="3657508" cy="4526280"/>
+          </a:xfrm>
+          <a:prstGeom prst="roundRect">
+            <a:avLst>
+              <a:gd name="adj" fmla="val 4000"/>
+            </a:avLst>
+          </a:prstGeom>
+          <a:solidFill>
+            <a:srgbClr val="EBB6AD"/>
+          </a:solidFill>
+          <a:ln>
+            <a:noFill/>
+          </a:ln>
+        </p:spPr>
+        <p:txBody>
+          <a:bodyPr rtlCol="0" anchor="ctr" wrap="square" lIns="54864" rIns="54864" tIns="27432" bIns="27432">
+            <a:noAutofit/>
+          </a:bodyPr>
+          <a:lstStyle/>
+          <a:p>
+            <a:pPr algn="ctr">
+              <a:lnSpc>
+                <a:spcPct val="100000"/>
+              </a:lnSpc>
+            </a:pPr>
+            <a:r>
+              <a:rPr sz="1400" b="0" i="0">
+                <a:solidFill>
+                  <a:srgbClr val="492C27"/>
+                </a:solidFill>
+              </a:rPr>
+              <a:t>사진을 넣어 주세요</a:t>
+            </a:r>
+          </a:p>
+        </p:txBody>
+      </p:sp>
+      <p:sp>
+        <p:nvSpPr>
+          <p:cNvPr id="4" name="장식"/>
+          <p:cNvSpPr/>
+          <p:nvPr/>
+        </p:nvSpPr>
+        <p:spPr>
+          <a:xfrm>
+            <a:off x="975335" y="1234439"/>
+            <a:ext cx="3657508" cy="4526280"/>
+          </a:xfrm>
+          <a:prstGeom prst="roundRect">
+            <a:avLst>
+              <a:gd name="adj" fmla="val 4000"/>
+            </a:avLst>
+          </a:prstGeom>
+          <a:noFill/>
+          <a:ln w="9525">
+            <a:solidFill>
+              <a:srgbClr val="26231F"/>
+            </a:solidFill>
+          </a:ln>
+        </p:spPr>
+        <p:txBody>
+          <a:bodyPr rtlCol="0" anchor="ctr"/>
+          <a:lstStyle/>
+          <a:p>
+            <a:pPr algn="ctr"/>
+          </a:p>
+        </p:txBody>
+      </p:sp>
+      <p:sp>
+        <p:nvSpPr>
+          <p:cNvPr id="5" name="라벨"/>
+          <p:cNvSpPr txBox="1"/>
+          <p:nvPr/>
+        </p:nvSpPr>
+        <p:spPr>
+          <a:xfrm>
+            <a:off x="6827349" y="2148840"/>
+            <a:ext cx="4632844" cy="274320"/>
           </a:xfrm>
           <a:prstGeom prst="rect">
             <a:avLst/>
           </a:prstGeom>
-        </p:spPr>
-      </p:pic>
+          <a:noFill/>
+        </p:spPr>
+        <p:txBody>
+          <a:bodyPr wrap="square" lIns="54864" rIns="54864" tIns="27432" bIns="27432" anchor="t">
+            <a:noAutofit/>
+          </a:bodyPr>
+          <a:lstStyle/>
+          <a:p>
+            <a:pPr algn="l">
+              <a:lnSpc>
+                <a:spcPct val="115000"/>
+              </a:lnSpc>
+            </a:pPr>
+            <a:r>
+              <a:rPr sz="1000" b="1" i="0" spc="250">
+                <a:solidFill>
+                  <a:srgbClr val="26231F"/>
+                </a:solidFill>
+              </a:rPr>
+              <a:t>WEDDING</a:t>
+            </a:r>
+          </a:p>
+        </p:txBody>
+      </p:sp>
       <p:sp>
         <p:nvSpPr>
           <p:cNvPr id="2" name="Title 1"/>
@@ -5486,8 +5897,8 @@
         </p:nvSpPr>
         <p:spPr>
           <a:xfrm>
-            <a:off x="853418" y="2057400"/>
-            <a:ext cx="6095847" cy="1554480"/>
+            <a:off x="6827349" y="2606040"/>
+            <a:ext cx="4632844" cy="1188720"/>
           </a:xfrm>
         </p:spPr>
         <p:txBody>
@@ -5504,7 +5915,7 @@
             <a:r>
               <a:rPr sz="3400" b="1" i="0">
                 <a:solidFill>
-                  <a:srgbClr val="4D2019"/>
+                  <a:srgbClr val="26231F"/>
                 </a:solidFill>
               </a:rPr>
               <a:t>와 주셔서 고맙습니다</a:t>
@@ -5514,14 +5925,14 @@
       </p:sp>
       <p:sp>
         <p:nvSpPr>
-          <p:cNvPr id="4" name="한 줄 문구"/>
+          <p:cNvPr id="6" name="한 줄 문구"/>
           <p:cNvSpPr txBox="1"/>
           <p:nvPr/>
         </p:nvSpPr>
         <p:spPr>
           <a:xfrm>
-            <a:off x="853418" y="3749039"/>
-            <a:ext cx="6095847" cy="822960"/>
+            <a:off x="6827349" y="3886200"/>
+            <a:ext cx="4632844" cy="822960"/>
           </a:xfrm>
           <a:prstGeom prst="rect">
             <a:avLst/>
@@ -5540,9 +5951,9 @@
               </a:lnSpc>
             </a:pPr>
             <a:r>
-              <a:rPr sz="1700" b="0" i="1">
-                <a:solidFill>
-                  <a:srgbClr val="4D2019"/>
+              <a:rPr sz="1700" b="0" i="0">
+                <a:solidFill>
+                  <a:srgbClr val="26231F"/>
                 </a:solidFill>
               </a:rPr>
               <a:t>잘 살겠습니다</a:t>
@@ -5552,14 +5963,14 @@
       </p:sp>
       <p:sp>
         <p:nvSpPr>
-          <p:cNvPr id="5" name="안내 문구"/>
+          <p:cNvPr id="7" name="안내 문구"/>
           <p:cNvSpPr txBox="1"/>
           <p:nvPr/>
         </p:nvSpPr>
         <p:spPr>
           <a:xfrm>
-            <a:off x="853418" y="4617720"/>
-            <a:ext cx="6095847" cy="914400"/>
+            <a:off x="6827349" y="4754880"/>
+            <a:ext cx="4632844" cy="914400"/>
           </a:xfrm>
           <a:prstGeom prst="rect">
             <a:avLst/>
@@ -5580,7 +5991,7 @@
             <a:r>
               <a:rPr sz="1400" b="0" i="0">
                 <a:solidFill>
-                  <a:srgbClr val="666666"/>
+                  <a:srgbClr val="26231F"/>
                 </a:solidFill>
               </a:rPr>
               <a:t>신랑 이름 ♥ 신부 이름</a:t>
@@ -5607,34 +6018,34 @@
         <a:sysClr val="window" lastClr="FFFFFF"/>
       </a:lt1>
       <a:dk2>
-        <a:srgbClr val="4D2019"/>
+        <a:srgbClr val="492C27"/>
       </a:dk2>
       <a:lt2>
-        <a:srgbClr val="FAF1F0"/>
+        <a:srgbClr val="FBEEEC"/>
       </a:lt2>
       <a:accent1>
-        <a:srgbClr val="994133"/>
+        <a:srgbClr val="D88579"/>
       </a:accent1>
       <a:accent2>
-        <a:srgbClr val="3B9171"/>
+        <a:srgbClr val="E1C498"/>
       </a:accent2>
       <a:accent3>
-        <a:srgbClr val="4D2019"/>
+        <a:srgbClr val="492C27"/>
       </a:accent3>
       <a:accent4>
-        <a:srgbClr val="F1D4D0"/>
+        <a:srgbClr val="F6D9D5"/>
       </a:accent4>
       <a:accent5>
-        <a:srgbClr val="6A6952"/>
+        <a:srgbClr val="DCA488"/>
       </a:accent5>
       <a:accent6>
-        <a:srgbClr val="947975"/>
+        <a:srgbClr val="92807D"/>
       </a:accent6>
       <a:hlink>
-        <a:srgbClr val="994133"/>
+        <a:srgbClr val="D88579"/>
       </a:hlink>
       <a:folHlink>
-        <a:srgbClr val="4D2019"/>
+        <a:srgbClr val="492C27"/>
       </a:folHlink>
     </a:clrScheme>
     <a:fontScheme name="Office">
